--- a/reports/final_deck_demo.pptx
+++ b/reports/final_deck_demo.pptx
@@ -4457,7 +4457,7 @@
                 <a:ea typeface="Calibri" pitchFamily="34" charset="-122"/>
                 <a:cs typeface="Calibri" pitchFamily="34" charset="-120"/>
               </a:rPr>
-              <a:t>5 of the 10 identified risks already have a guardrail or leading-indicator metric watching for them — designed against these exact failure modes, not in a vacuum.</a:t>
+              <a:t>5 of the 11 identified risks already have a guardrail or leading-indicator metric watching for them — designed against these exact failure modes, not in a vacuum.</a:t>
             </a:r>
             <a:endParaRPr lang="en-US" sz="1500" dirty="0"/>
           </a:p>
@@ -4499,7 +4499,7 @@
                 <a:ea typeface="Calibri" pitchFamily="34" charset="-122"/>
                 <a:cs typeface="Calibri" pitchFamily="34" charset="-120"/>
               </a:rPr>
-              <a:t>Next: complete primary-research interviews, deploy the MVP publicly, and gate scale-up on a real 30-day conversion A/B test.</a:t>
+              <a:t>Next: deploy the MVP publicly, add a mechanism-preference signal to the agent, and gate scale-up on a real 30-day conversion A/B test.</a:t>
             </a:r>
             <a:endParaRPr lang="en-US" sz="1400" dirty="0"/>
           </a:p>
@@ -5646,7 +5646,7 @@
                 <a:ea typeface="Calibri" pitchFamily="34" charset="-122"/>
                 <a:cs typeface="Calibri" pitchFamily="34" charset="-120"/>
               </a:rPr>
-              <a:t>PRIMARY RESEARCH · WISHLIST BEHAVIOR SURVEY, N=36</a:t>
+              <a:t>PRIMARY RESEARCH · SURVEY N=36 + INTERVIEWS N=2</a:t>
             </a:r>
             <a:endParaRPr lang="en-US" sz="1400" dirty="0"/>
           </a:p>
@@ -5688,7 +5688,7 @@
                 <a:ea typeface="Cambria" pitchFamily="34" charset="-122"/>
                 <a:cs typeface="Cambria" pitchFamily="34" charset="-120"/>
               </a:rPr>
-              <a:t>The Survey Confirms It: Shoppers Compare, Then They Forget</a:t>
+              <a:t>Survey and Interviews Agree: Shoppers Compare, Then They Forget</a:t>
             </a:r>
             <a:endParaRPr lang="en-US" sz="2700" dirty="0"/>
           </a:p>
@@ -6077,8 +6077,8 @@
         </p:nvSpPr>
         <p:spPr>
           <a:xfrm>
-            <a:off x="1554480" y="4279392"/>
-            <a:ext cx="9905695" cy="1005840"/>
+            <a:off x="1554480" y="4224528"/>
+            <a:ext cx="9905695" cy="1115568"/>
           </a:xfrm>
           <a:prstGeom prst="rect">
             <a:avLst/>
@@ -6092,7 +6092,7 @@
           <a:p>
             <a:pPr indent="0" marL="0">
               <a:lnSpc>
-                <a:spcPct val="115000"/>
+                <a:spcPct val="112000"/>
               </a:lnSpc>
               <a:buNone/>
             </a:pPr>
@@ -6105,7 +6105,7 @@
                 <a:ea typeface="Calibri" pitchFamily="34" charset="-122"/>
                 <a:cs typeface="Calibri" pitchFamily="34" charset="-120"/>
               </a:rPr>
-              <a:t>Qualitative interviews with 5–6 Active Comparers are in progress to corroborate these survey findings with real conversation, using the same evidence-vs-interpretation discipline as the AI-extracted quotes.</a:t>
+              <a:t>Two completed interviews confirm this unprompted — “I wanted to compare, shortlist and compare” (converter) and “I want to compare it on other platforms” (non-converter) — and sharpen it: fit uncertainty concentrates on unfamiliar brands, and “Active Comparer” is a per-item state, not a fixed trait.</a:t>
             </a:r>
             <a:endParaRPr lang="en-US" sz="1400" dirty="0"/>
           </a:p>
@@ -6121,8 +6121,8 @@
         </p:nvSpPr>
         <p:spPr>
           <a:xfrm>
-            <a:off x="502920" y="5532120"/>
-            <a:ext cx="7315200" cy="320040"/>
+            <a:off x="502920" y="5504688"/>
+            <a:ext cx="5120640" cy="292608"/>
           </a:xfrm>
           <a:prstGeom prst="rect">
             <a:avLst/>
@@ -6161,14 +6161,16 @@
       </p:sp>
       <p:sp>
         <p:nvSpPr>
-          <p:cNvPr id="18" name="Text 15"/>
-          <p:cNvSpPr txBox="1"/>
-          <p:nvPr/>
-        </p:nvSpPr>
-        <p:spPr>
-          <a:xfrm>
-            <a:off x="502920" y="6473952"/>
-            <a:ext cx="7315200" cy="274320"/>
+          <p:cNvPr id="18" name="Text 15">
+            <a:hlinkClick r:id="rId3" tooltip=""/>
+          </p:cNvPr>
+          <p:cNvSpPr txBox="1"/>
+          <p:nvPr/>
+        </p:nvSpPr>
+        <p:spPr>
+          <a:xfrm>
+            <a:off x="502920" y="5815584"/>
+            <a:ext cx="7315200" cy="292608"/>
           </a:xfrm>
           <a:prstGeom prst="rect">
             <a:avLst/>
@@ -6184,13 +6186,59 @@
               <a:buNone/>
             </a:pPr>
             <a:r>
-              <a:rPr lang="en-US" sz="1400" i="1" dirty="0">
-                <a:solidFill>
-                  <a:srgbClr val="475569"/>
+              <a:rPr lang="en-US" sz="1400" i="1" u="sng" dirty="0">
+                <a:solidFill>
+                  <a:srgbClr val="0F766E"/>
                 </a:solidFill>
                 <a:latin typeface="Calibri" pitchFamily="34" charset="0"/>
                 <a:ea typeface="Calibri" pitchFamily="34" charset="-122"/>
                 <a:cs typeface="Calibri" pitchFamily="34" charset="-120"/>
+                <a:hlinkClick r:id="rId3" invalidUrl="" action="" tgtFrame="" tooltip="" history="1" highlightClick="0" endSnd="0">
+                  <a:extLst>
+                    <a:ext uri="{A12FA001-AC4F-418D-AE19-62706E023703}">
+                      <ahyp:hlinkClr xmlns:ahyp="http://schemas.microsoft.com/office/drawing/2018/hyperlinkcolor" val="tx"/>
+                    </a:ext>
+                  </a:extLst>
+                </a:hlinkClick>
+              </a:rPr>
+              <a:t>Full interview findings: reports/interview_findings.md</a:t>
+            </a:r>
+            <a:endParaRPr lang="en-US" sz="1400" dirty="0"/>
+          </a:p>
+        </p:txBody>
+      </p:sp>
+      <p:sp>
+        <p:nvSpPr>
+          <p:cNvPr id="19" name="Text 16"/>
+          <p:cNvSpPr txBox="1"/>
+          <p:nvPr/>
+        </p:nvSpPr>
+        <p:spPr>
+          <a:xfrm>
+            <a:off x="502920" y="6473952"/>
+            <a:ext cx="7315200" cy="274320"/>
+          </a:xfrm>
+          <a:prstGeom prst="rect">
+            <a:avLst/>
+          </a:prstGeom>
+          <a:noFill/>
+          <a:ln/>
+        </p:spPr>
+        <p:txBody>
+          <a:bodyPr wrap="square" lIns="0" tIns="0" rIns="0" bIns="0" rtlCol="0" anchor="ctr"/>
+          <a:lstStyle/>
+          <a:p>
+            <a:pPr indent="0" marL="0">
+              <a:buNone/>
+            </a:pPr>
+            <a:r>
+              <a:rPr lang="en-US" sz="1400" i="1" dirty="0">
+                <a:solidFill>
+                  <a:srgbClr val="475569"/>
+                </a:solidFill>
+                <a:latin typeface="Calibri" pitchFamily="34" charset="0"/>
+                <a:ea typeface="Calibri" pitchFamily="34" charset="-122"/>
+                <a:cs typeface="Calibri" pitchFamily="34" charset="-120"/>
               </a:rPr>
               <a:t>Myntra Growth · Wishlist-to-Purchase Conversion</a:t>
             </a:r>
@@ -6200,7 +6248,7 @@
       </p:sp>
       <p:sp>
         <p:nvSpPr>
-          <p:cNvPr id="19" name="Text 16"/>
+          <p:cNvPr id="20" name="Text 17"/>
           <p:cNvSpPr txBox="1"/>
           <p:nvPr/>
         </p:nvSpPr>
@@ -10466,7 +10514,7 @@
                 <a:ea typeface="Calibri" pitchFamily="34" charset="-122"/>
                 <a:cs typeface="Calibri" pitchFamily="34" charset="-120"/>
               </a:rPr>
-              <a:t>RISKS &amp; MITIGATION · 4 OF 9 SHOWN, RANKED CRITICAL</a:t>
+              <a:t>RISKS &amp; MITIGATION · 4 OF 11 SHOWN, RANKED CRITICAL</a:t>
             </a:r>
             <a:endParaRPr lang="en-US" sz="1400" dirty="0"/>
           </a:p>
@@ -11144,7 +11192,7 @@
                   </a:extLst>
                 </a:hlinkClick>
               </a:rPr>
-              <a:t>Full risk register (9 total): reports/risks_and_mitigation.md</a:t>
+              <a:t>Full risk register (11 total): reports/risks_and_mitigation.md</a:t>
             </a:r>
             <a:endParaRPr lang="en-US" sz="1400" dirty="0"/>
           </a:p>
